--- a/deck/Art-and-Science-of-Vibe-Coding-v3.pptx
+++ b/deck/Art-and-Science-of-Vibe-Coding-v3.pptx
@@ -301,20 +301,12 @@
           <a:lstStyle/>
           <a:p>
             <a:r>
-              <a:rPr dirty="0"/>
-              <a:t>Open with the system on the right. The model is the brain at the center. The harness is the body around it: tools, context handling and execution. Your setup is the wider operating environment: instructions, tests, fixtures, workflows and acceptance criteria.</a:t>
-            </a:r>
-          </a:p>
-          <a:p>
-            <a:endParaRPr dirty="0"/>
-          </a:p>
-          <a:p>
-            <a:r>
-              <a:rPr dirty="0"/>
-              <a:t>The talk is not a model ranking or a product pitch. A strong model helps, but the result comes from how the brain, body and setup work together. The techniques transfer across capable models and harnesses.</a:t>
-            </a:r>
-          </a:p>
-          <a:p>
+              <a:rPr lang="en-US" dirty="0"/>
+              <a:t>Welcome to this special presentation “The Art and Science of Vibe Coding”  … My name is Sepehr Pakbaz AI solution Architect at Microsoft and GitHub. This presentation is for anyone that is using in Software Development Lifecycle and applies to any model or any harness that you are using today. Its not about a single product, its about the fundamental architecture of and ways that LLM can help us be more productive today minimizing the downsides. Reducing the cost, increase quality of the code and be more efficient in Software Development Lifecycle.</a:t>
+            </a:r>
+            <a:br>
+              <a:rPr lang="en-US" dirty="0"/>
+            </a:br>
             <a:endParaRPr dirty="0"/>
           </a:p>
           <a:p>
